--- a/1-Na_Descriptors/ARIS_Experiments/new_descriptors/automat-naconductor/presentation/两代描述符筛选阶段性汇报_ppt169_20260815/exports/两代描述符筛选阶段性汇报_20260816_181137.pptx
+++ b/1-Na_Descriptors/ARIS_Experiments/new_descriptors/automat-naconductor/presentation/两代描述符筛选阶段性汇报_ppt169_20260815/exports/两代描述符筛选阶段性汇报_20260816_181137.pptx
@@ -1667,13 +1667,13 @@
   <p:clrMapOvr>
     <a:masterClrMapping/>
   </p:clrMapOvr>
-  <mc:AlternateContent xmlns:mc="http://schemas.openxmlformats.org/markup-compatibility/2006">
-    <mc:Choice xmlns:p14="http://schemas.microsoft.com/office/powerpoint/2010/main" Requires="p14">
+  <mc:AlternateContent xmlns:mc="http://schemas.openxmlformats.org/markup-compatibility/2006" xmlns:p14="http://schemas.microsoft.com/office/powerpoint/2010/main">
+    <mc:Choice Requires="p14">
       <p:transition p14:dur="400">
         <p:fade/>
       </p:transition>
     </mc:Choice>
-    <mc:Fallback>
+    <mc:Fallback xmlns="">
       <p:transition>
         <p:fade/>
       </p:transition>
@@ -3726,13 +3726,13 @@
   <p:clrMapOvr>
     <a:masterClrMapping/>
   </p:clrMapOvr>
-  <mc:AlternateContent xmlns:mc="http://schemas.openxmlformats.org/markup-compatibility/2006">
-    <mc:Choice xmlns:p14="http://schemas.microsoft.com/office/powerpoint/2010/main" Requires="p14">
+  <mc:AlternateContent xmlns:mc="http://schemas.openxmlformats.org/markup-compatibility/2006" xmlns:p14="http://schemas.microsoft.com/office/powerpoint/2010/main">
+    <mc:Choice Requires="p14">
       <p:transition p14:dur="400">
         <p:fade/>
       </p:transition>
     </mc:Choice>
-    <mc:Fallback>
+    <mc:Fallback xmlns="">
       <p:transition>
         <p:fade/>
       </p:transition>
@@ -5381,13 +5381,13 @@
   <p:clrMapOvr>
     <a:masterClrMapping/>
   </p:clrMapOvr>
-  <mc:AlternateContent xmlns:mc="http://schemas.openxmlformats.org/markup-compatibility/2006">
-    <mc:Choice xmlns:p14="http://schemas.microsoft.com/office/powerpoint/2010/main" Requires="p14">
+  <mc:AlternateContent xmlns:mc="http://schemas.openxmlformats.org/markup-compatibility/2006" xmlns:p14="http://schemas.microsoft.com/office/powerpoint/2010/main">
+    <mc:Choice Requires="p14">
       <p:transition p14:dur="400">
         <p:fade/>
       </p:transition>
     </mc:Choice>
-    <mc:Fallback>
+    <mc:Fallback xmlns="">
       <p:transition>
         <p:fade/>
       </p:transition>
@@ -6916,13 +6916,13 @@
   <p:clrMapOvr>
     <a:masterClrMapping/>
   </p:clrMapOvr>
-  <mc:AlternateContent xmlns:mc="http://schemas.openxmlformats.org/markup-compatibility/2006">
-    <mc:Choice xmlns:p14="http://schemas.microsoft.com/office/powerpoint/2010/main" Requires="p14">
+  <mc:AlternateContent xmlns:mc="http://schemas.openxmlformats.org/markup-compatibility/2006" xmlns:p14="http://schemas.microsoft.com/office/powerpoint/2010/main">
+    <mc:Choice Requires="p14">
       <p:transition p14:dur="400">
         <p:fade/>
       </p:transition>
     </mc:Choice>
-    <mc:Fallback>
+    <mc:Fallback xmlns="">
       <p:transition>
         <p:fade/>
       </p:transition>
@@ -8759,13 +8759,13 @@
   <p:clrMapOvr>
     <a:masterClrMapping/>
   </p:clrMapOvr>
-  <mc:AlternateContent xmlns:mc="http://schemas.openxmlformats.org/markup-compatibility/2006">
-    <mc:Choice xmlns:p14="http://schemas.microsoft.com/office/powerpoint/2010/main" Requires="p14">
+  <mc:AlternateContent xmlns:mc="http://schemas.openxmlformats.org/markup-compatibility/2006" xmlns:p14="http://schemas.microsoft.com/office/powerpoint/2010/main">
+    <mc:Choice Requires="p14">
       <p:transition p14:dur="400">
         <p:fade/>
       </p:transition>
     </mc:Choice>
-    <mc:Fallback>
+    <mc:Fallback xmlns="">
       <p:transition>
         <p:fade/>
       </p:transition>
@@ -9926,13 +9926,13 @@
   <p:clrMapOvr>
     <a:masterClrMapping/>
   </p:clrMapOvr>
-  <mc:AlternateContent xmlns:mc="http://schemas.openxmlformats.org/markup-compatibility/2006">
-    <mc:Choice xmlns:p14="http://schemas.microsoft.com/office/powerpoint/2010/main" Requires="p14">
+  <mc:AlternateContent xmlns:mc="http://schemas.openxmlformats.org/markup-compatibility/2006" xmlns:p14="http://schemas.microsoft.com/office/powerpoint/2010/main">
+    <mc:Choice Requires="p14">
       <p:transition p14:dur="400">
         <p:fade/>
       </p:transition>
     </mc:Choice>
-    <mc:Fallback>
+    <mc:Fallback xmlns="">
       <p:transition>
         <p:fade/>
       </p:transition>
@@ -12527,13 +12527,13 @@
   <p:clrMapOvr>
     <a:masterClrMapping/>
   </p:clrMapOvr>
-  <mc:AlternateContent xmlns:mc="http://schemas.openxmlformats.org/markup-compatibility/2006">
-    <mc:Choice xmlns:p14="http://schemas.microsoft.com/office/powerpoint/2010/main" Requires="p14">
+  <mc:AlternateContent xmlns:mc="http://schemas.openxmlformats.org/markup-compatibility/2006" xmlns:p14="http://schemas.microsoft.com/office/powerpoint/2010/main">
+    <mc:Choice Requires="p14">
       <p:transition p14:dur="400">
         <p:fade/>
       </p:transition>
     </mc:Choice>
-    <mc:Fallback>
+    <mc:Fallback xmlns="">
       <p:transition>
         <p:fade/>
       </p:transition>
@@ -14079,13 +14079,13 @@
   <p:clrMapOvr>
     <a:masterClrMapping/>
   </p:clrMapOvr>
-  <mc:AlternateContent xmlns:mc="http://schemas.openxmlformats.org/markup-compatibility/2006">
-    <mc:Choice xmlns:p14="http://schemas.microsoft.com/office/powerpoint/2010/main" Requires="p14">
+  <mc:AlternateContent xmlns:mc="http://schemas.openxmlformats.org/markup-compatibility/2006" xmlns:p14="http://schemas.microsoft.com/office/powerpoint/2010/main">
+    <mc:Choice Requires="p14">
       <p:transition p14:dur="400">
         <p:fade/>
       </p:transition>
     </mc:Choice>
-    <mc:Fallback>
+    <mc:Fallback xmlns="">
       <p:transition>
         <p:fade/>
       </p:transition>
@@ -15879,13 +15879,13 @@
   <p:clrMapOvr>
     <a:masterClrMapping/>
   </p:clrMapOvr>
-  <mc:AlternateContent xmlns:mc="http://schemas.openxmlformats.org/markup-compatibility/2006">
-    <mc:Choice xmlns:p14="http://schemas.microsoft.com/office/powerpoint/2010/main" Requires="p14">
+  <mc:AlternateContent xmlns:mc="http://schemas.openxmlformats.org/markup-compatibility/2006" xmlns:p14="http://schemas.microsoft.com/office/powerpoint/2010/main">
+    <mc:Choice Requires="p14">
       <p:transition p14:dur="400">
         <p:fade/>
       </p:transition>
     </mc:Choice>
-    <mc:Fallback>
+    <mc:Fallback xmlns="">
       <p:transition>
         <p:fade/>
       </p:transition>
@@ -17363,13 +17363,13 @@
   <p:clrMapOvr>
     <a:masterClrMapping/>
   </p:clrMapOvr>
-  <mc:AlternateContent xmlns:mc="http://schemas.openxmlformats.org/markup-compatibility/2006">
-    <mc:Choice xmlns:p14="http://schemas.microsoft.com/office/powerpoint/2010/main" Requires="p14">
+  <mc:AlternateContent xmlns:mc="http://schemas.openxmlformats.org/markup-compatibility/2006" xmlns:p14="http://schemas.microsoft.com/office/powerpoint/2010/main">
+    <mc:Choice Requires="p14">
       <p:transition p14:dur="400">
         <p:fade/>
       </p:transition>
     </mc:Choice>
-    <mc:Fallback>
+    <mc:Fallback xmlns="">
       <p:transition>
         <p:fade/>
       </p:transition>
@@ -19370,13 +19370,13 @@
   <p:clrMapOvr>
     <a:masterClrMapping/>
   </p:clrMapOvr>
-  <mc:AlternateContent xmlns:mc="http://schemas.openxmlformats.org/markup-compatibility/2006">
-    <mc:Choice xmlns:p14="http://schemas.microsoft.com/office/powerpoint/2010/main" Requires="p14">
+  <mc:AlternateContent xmlns:mc="http://schemas.openxmlformats.org/markup-compatibility/2006" xmlns:p14="http://schemas.microsoft.com/office/powerpoint/2010/main">
+    <mc:Choice Requires="p14">
       <p:transition p14:dur="400">
         <p:fade/>
       </p:transition>
     </mc:Choice>
-    <mc:Fallback>
+    <mc:Fallback xmlns="">
       <p:transition>
         <p:fade/>
       </p:transition>
@@ -20596,13 +20596,13 @@
   <p:clrMapOvr>
     <a:masterClrMapping/>
   </p:clrMapOvr>
-  <mc:AlternateContent xmlns:mc="http://schemas.openxmlformats.org/markup-compatibility/2006">
-    <mc:Choice xmlns:p14="http://schemas.microsoft.com/office/powerpoint/2010/main" Requires="p14">
+  <mc:AlternateContent xmlns:mc="http://schemas.openxmlformats.org/markup-compatibility/2006" xmlns:p14="http://schemas.microsoft.com/office/powerpoint/2010/main">
+    <mc:Choice Requires="p14">
       <p:transition p14:dur="400">
         <p:fade/>
       </p:transition>
     </mc:Choice>
-    <mc:Fallback>
+    <mc:Fallback xmlns="">
       <p:transition>
         <p:fade/>
       </p:transition>
